--- a/public/samples/sales-deck.pptx
+++ b/public/samples/sales-deck.pptx
@@ -2017,7 +2017,7 @@
                 <a:ea typeface="Yu Gothic" pitchFamily="34" charset="-122"/>
                 <a:cs typeface="Yu Gothic" pitchFamily="34" charset="-120"/>
               </a:rPr>
-              <a:t>MINERVOT · 2026年8月22日</a:t>
+              <a:t>MINERVOT · 2026年9月23日</a:t>
             </a:r>
             <a:endParaRPr lang="en-US" sz="1100" dirty="0"/>
           </a:p>

--- a/public/samples/sales-deck.pptx
+++ b/public/samples/sales-deck.pptx
@@ -2017,7 +2017,7 @@
                 <a:ea typeface="Yu Gothic" pitchFamily="34" charset="-122"/>
                 <a:cs typeface="Yu Gothic" pitchFamily="34" charset="-120"/>
               </a:rPr>
-              <a:t>MINERVOT · 2026年9月23日</a:t>
+              <a:t>MINERVOT · 2026年9月28日</a:t>
             </a:r>
             <a:endParaRPr lang="en-US" sz="1100" dirty="0"/>
           </a:p>
